--- a/docs/MES-TinhNang.pptx
+++ b/docs/MES-TinhNang.pptx
@@ -3713,7 +3713,7 @@
                 </a:solidFill>
                 <a:latin typeface="Cambria"/>
               </a:rPr>
-              <a:t>~31</a:t>
+              <a:t>32</a:t>
             </a:r>
           </a:p>
         </p:txBody>
@@ -3843,7 +3843,7 @@
                 </a:solidFill>
                 <a:latin typeface="Cambria"/>
               </a:rPr>
-              <a:t>~180</a:t>
+              <a:t>~379</a:t>
             </a:r>
           </a:p>
         </p:txBody>
@@ -3973,7 +3973,7 @@
                 </a:solidFill>
                 <a:latin typeface="Cambria"/>
               </a:rPr>
-              <a:t>~40</a:t>
+              <a:t>~100</a:t>
             </a:r>
           </a:p>
         </p:txBody>
@@ -4015,7 +4015,7 @@
                 </a:solidFill>
                 <a:latin typeface="Calibri"/>
               </a:rPr>
-              <a:t>bảng dữ liệu</a:t>
+              <a:t>lớp dữ liệu</a:t>
             </a:r>
           </a:p>
         </p:txBody>
@@ -4103,7 +4103,7 @@
                 </a:solidFill>
                 <a:latin typeface="Cambria"/>
               </a:rPr>
-              <a:t>28</a:t>
+              <a:t>27</a:t>
             </a:r>
           </a:p>
         </p:txBody>
@@ -4145,7 +4145,7 @@
                 </a:solidFill>
                 <a:latin typeface="Calibri"/>
               </a:rPr>
-              <a:t>tab giao diện</a:t>
+              <a:t>nhóm tính năng</a:t>
             </a:r>
           </a:p>
         </p:txBody>
@@ -4233,7 +4233,7 @@
                 </a:solidFill>
                 <a:latin typeface="Cambria"/>
               </a:rPr>
-              <a:t>23</a:t>
+              <a:t>47</a:t>
             </a:r>
           </a:p>
         </p:txBody>
@@ -4493,7 +4493,7 @@
                 </a:solidFill>
                 <a:latin typeface="Cambria"/>
               </a:rPr>
-              <a:t>30/30</a:t>
+              <a:t>57</a:t>
             </a:r>
           </a:p>
         </p:txBody>
@@ -4535,7 +4535,7 @@
                 </a:solidFill>
                 <a:latin typeface="Calibri"/>
               </a:rPr>
-              <a:t>test tự động</a:t>
+              <a:t>file test</a:t>
             </a:r>
           </a:p>
         </p:txBody>
@@ -4665,7 +4665,7 @@
                 </a:solidFill>
                 <a:latin typeface="Calibri"/>
               </a:rPr>
-              <a:t>vai trò + 19 quyền</a:t>
+              <a:t>vai trò + 21 quyền</a:t>
             </a:r>
           </a:p>
         </p:txBody>
@@ -5074,7 +5074,7 @@
                 </a:solidFill>
                 <a:latin typeface="Calibri"/>
               </a:rPr>
-              <a:t>Dispatch phát mẻ</a:t>
+              <a:t>Lệnh nấu/lọc phân cấp</a:t>
             </a:r>
           </a:p>
           <a:p>
@@ -5093,7 +5093,7 @@
                 </a:solidFill>
                 <a:latin typeface="Calibri"/>
               </a:rPr>
-              <a:t>planned vs actual</a:t>
+              <a:t>   (cha → nhiều lệnh con)</a:t>
             </a:r>
           </a:p>
           <a:p>
@@ -5112,26 +5112,26 @@
                 </a:solidFill>
                 <a:latin typeface="Calibri"/>
               </a:rPr>
+              <a:t>Hoàn thành theo thể tích</a:t>
+            </a:r>
+          </a:p>
+          <a:p>
+            <a:pPr algn="l">
+              <a:lnSpc>
+                <a:spcPct val="106000"/>
+              </a:lnSpc>
+              <a:spcAft>
+                <a:spcPts val="200"/>
+              </a:spcAft>
+            </a:pPr>
+            <a:r>
+              <a:rPr sz="1250" b="0" i="0">
+                <a:solidFill>
+                  <a:srgbClr val="222A3A"/>
+                </a:solidFill>
+                <a:latin typeface="Calibri"/>
+              </a:rPr>
               <a:t>Lập lịch Gantt tối ưu</a:t>
-            </a:r>
-          </a:p>
-          <a:p>
-            <a:pPr algn="l">
-              <a:lnSpc>
-                <a:spcPct val="106000"/>
-              </a:lnSpc>
-              <a:spcAft>
-                <a:spcPts val="200"/>
-              </a:spcAft>
-            </a:pPr>
-            <a:r>
-              <a:rPr sz="1250" b="0" i="0">
-                <a:solidFill>
-                  <a:srgbClr val="222A3A"/>
-                </a:solidFill>
-                <a:latin typeface="Calibri"/>
-              </a:rPr>
-              <a:t>CIP + né bảo trì</a:t>
             </a:r>
           </a:p>
         </p:txBody>
@@ -6657,7 +6657,7 @@
                 </a:solidFill>
                 <a:latin typeface="Calibri"/>
               </a:rPr>
-              <a:t>Kho NVL</a:t>
+              <a:t>Kho NVL — 2 địa điểm</a:t>
             </a:r>
           </a:p>
         </p:txBody>
@@ -6693,13 +6693,13 @@
               </a:spcAft>
             </a:pPr>
             <a:r>
-              <a:rPr sz="1250" b="0" i="0">
+              <a:rPr sz="1200" b="0" i="0">
                 <a:solidFill>
                   <a:srgbClr val="222A3A"/>
                 </a:solidFill>
                 <a:latin typeface="Calibri"/>
               </a:rPr>
-              <a:t>Nhập / xuất / hoàn / sang ngang</a:t>
+              <a:t>Kho công ty ↔ Kho phân xưởng</a:t>
             </a:r>
           </a:p>
           <a:p>
@@ -6712,13 +6712,13 @@
               </a:spcAft>
             </a:pPr>
             <a:r>
-              <a:rPr sz="1250" b="0" i="0">
+              <a:rPr sz="1200" b="0" i="0">
                 <a:solidFill>
                   <a:srgbClr val="222A3A"/>
                 </a:solidFill>
                 <a:latin typeface="Calibri"/>
               </a:rPr>
-              <a:t>Sổ cái bất biến</a:t>
+              <a:t>Đề nghị nhận kho (FIFO)</a:t>
             </a:r>
           </a:p>
           <a:p>
@@ -6731,13 +6731,13 @@
               </a:spcAft>
             </a:pPr>
             <a:r>
-              <a:rPr sz="1250" b="0" i="0">
+              <a:rPr sz="1200" b="0" i="0">
                 <a:solidFill>
                   <a:srgbClr val="222A3A"/>
                 </a:solidFill>
                 <a:latin typeface="Calibri"/>
               </a:rPr>
-              <a:t>Tồn on-hand</a:t>
+              <a:t>Kiểm kê định kỳ + duyệt</a:t>
             </a:r>
           </a:p>
           <a:p>
@@ -6750,13 +6750,13 @@
               </a:spcAft>
             </a:pPr>
             <a:r>
-              <a:rPr sz="1250" b="0" i="0">
+              <a:rPr sz="1200" b="0" i="0">
                 <a:solidFill>
                   <a:srgbClr val="222A3A"/>
                 </a:solidFill>
                 <a:latin typeface="Calibri"/>
               </a:rPr>
-              <a:t>Thẻ kho (số dư lũy kế)</a:t>
+              <a:t>Sổ cái bất biến + hoàn tác</a:t>
             </a:r>
           </a:p>
           <a:p>
@@ -6769,13 +6769,13 @@
               </a:spcAft>
             </a:pPr>
             <a:r>
-              <a:rPr sz="1250" b="0" i="0">
+              <a:rPr sz="1200" b="0" i="0">
                 <a:solidFill>
                   <a:srgbClr val="222A3A"/>
                 </a:solidFill>
                 <a:latin typeface="Calibri"/>
               </a:rPr>
-              <a:t>Hạn sử dụng (FEFO)</a:t>
+              <a:t>Cảnh báo tồn tối thiểu</a:t>
             </a:r>
           </a:p>
           <a:p>
@@ -6788,13 +6788,13 @@
               </a:spcAft>
             </a:pPr>
             <a:r>
-              <a:rPr sz="1250" b="0" i="0">
+              <a:rPr sz="1200" b="0" i="0">
                 <a:solidFill>
                   <a:srgbClr val="222A3A"/>
                 </a:solidFill>
                 <a:latin typeface="Calibri"/>
               </a:rPr>
-              <a:t>BC nhập-xuất-tồn</a:t>
+              <a:t>Lịch sử dùng NVL theo mẻ</a:t>
             </a:r>
           </a:p>
         </p:txBody>
@@ -6935,7 +6935,7 @@
                 </a:solidFill>
                 <a:latin typeface="Calibri"/>
               </a:rPr>
-              <a:t>Kho TP (WMS)</a:t>
+              <a:t>Kho TP (WMS theo unit)</a:t>
             </a:r>
           </a:p>
         </p:txBody>
@@ -6971,13 +6971,13 @@
               </a:spcAft>
             </a:pPr>
             <a:r>
-              <a:rPr sz="1250" b="0" i="0">
+              <a:rPr sz="1200" b="0" i="0">
                 <a:solidFill>
                   <a:srgbClr val="222A3A"/>
                 </a:solidFill>
                 <a:latin typeface="Calibri"/>
               </a:rPr>
-              <a:t>Đóng pallet (+ case + barcode)</a:t>
+              <a:t>FinishedGoodsUnit (thay pallet)</a:t>
             </a:r>
           </a:p>
           <a:p>
@@ -6990,13 +6990,13 @@
               </a:spcAft>
             </a:pPr>
             <a:r>
-              <a:rPr sz="1250" b="0" i="0">
+              <a:rPr sz="1200" b="0" i="0">
                 <a:solidFill>
                   <a:srgbClr val="222A3A"/>
                 </a:solidFill>
                 <a:latin typeface="Calibri"/>
               </a:rPr>
-              <a:t>Vị trí kho (bin/cold/dock)</a:t>
+              <a:t>Cất vị trí / điều chuyển</a:t>
             </a:r>
           </a:p>
           <a:p>
@@ -7009,13 +7009,13 @@
               </a:spcAft>
             </a:pPr>
             <a:r>
-              <a:rPr sz="1250" b="0" i="0">
+              <a:rPr sz="1200" b="0" i="0">
                 <a:solidFill>
                   <a:srgbClr val="222A3A"/>
                 </a:solidFill>
                 <a:latin typeface="Calibri"/>
               </a:rPr>
-              <a:t>Putaway / ship</a:t>
+              <a:t>Phân rã &amp; gộp theo lô</a:t>
             </a:r>
           </a:p>
           <a:p>
@@ -7028,13 +7028,13 @@
               </a:spcAft>
             </a:pPr>
             <a:r>
-              <a:rPr sz="1250" b="0" i="0">
+              <a:rPr sz="1200" b="0" i="0">
                 <a:solidFill>
                   <a:srgbClr val="222A3A"/>
                 </a:solidFill>
                 <a:latin typeface="Calibri"/>
               </a:rPr>
-              <a:t>% lấp đầy</a:t>
+              <a:t>Bia cận date + Xuất tự do</a:t>
             </a:r>
           </a:p>
           <a:p>
@@ -7047,13 +7047,13 @@
               </a:spcAft>
             </a:pPr>
             <a:r>
-              <a:rPr sz="1250" b="0" i="0">
+              <a:rPr sz="1200" b="0" i="0">
                 <a:solidFill>
                   <a:srgbClr val="222A3A"/>
                 </a:solidFill>
                 <a:latin typeface="Calibri"/>
               </a:rPr>
-              <a:t>Phân giải barcode</a:t>
+              <a:t>Lệnh đóng hàng (import Excel)</a:t>
             </a:r>
           </a:p>
           <a:p>
@@ -7066,13 +7066,13 @@
               </a:spcAft>
             </a:pPr>
             <a:r>
-              <a:rPr sz="1250" b="0" i="0">
+              <a:rPr sz="1200" b="0" i="0">
                 <a:solidFill>
                   <a:srgbClr val="222A3A"/>
                 </a:solidFill>
                 <a:latin typeface="Calibri"/>
               </a:rPr>
-              <a:t>Tem Code39</a:t>
+              <a:t>Xuất kho FIFO theo loại</a:t>
             </a:r>
           </a:p>
         </p:txBody>
@@ -9978,7 +9978,7 @@
                 </a:solidFill>
                 <a:latin typeface="Calibri"/>
               </a:rPr>
-              <a:t>Edge &amp; Realtime</a:t>
+              <a:t>Realtime SCADA thật</a:t>
             </a:r>
           </a:p>
         </p:txBody>
@@ -10014,13 +10014,13 @@
               </a:spcAft>
             </a:pPr>
             <a:r>
-              <a:rPr sz="1250" b="0" i="0">
+              <a:rPr sz="1200" b="0" i="0">
                 <a:solidFill>
                   <a:srgbClr val="222A3A"/>
                 </a:solidFill>
                 <a:latin typeface="Calibri"/>
               </a:rPr>
-              <a:t>Historian time-series</a:t>
+              <a:t>Đọc trực tiếp CSDL WinCC</a:t>
             </a:r>
           </a:p>
           <a:p>
@@ -10033,13 +10033,13 @@
               </a:spcAft>
             </a:pPr>
             <a:r>
-              <a:rPr sz="1250" b="0" i="0">
+              <a:rPr sz="1200" b="0" i="0">
                 <a:solidFill>
                   <a:srgbClr val="222A3A"/>
                 </a:solidFill>
                 <a:latin typeface="Calibri"/>
               </a:rPr>
-              <a:t>Tag UNS + downsample</a:t>
+              <a:t>   ngoài (WAN), chỉ SELECT</a:t>
             </a:r>
           </a:p>
           <a:p>
@@ -10052,13 +10052,13 @@
               </a:spcAft>
             </a:pPr>
             <a:r>
-              <a:rPr sz="1250" b="0" i="0">
+              <a:rPr sz="1200" b="0" i="0">
                 <a:solidFill>
                   <a:srgbClr val="222A3A"/>
                 </a:solidFill>
                 <a:latin typeface="Calibri"/>
               </a:rPr>
-              <a:t>Tab Realtime auto 4s</a:t>
+              <a:t>Máy chiết 30K + trạm</a:t>
             </a:r>
           </a:p>
           <a:p>
@@ -10071,13 +10071,51 @@
               </a:spcAft>
             </a:pPr>
             <a:r>
-              <a:rPr sz="1250" b="0" i="0">
+              <a:rPr sz="1200" b="0" i="0">
                 <a:solidFill>
                   <a:srgbClr val="222A3A"/>
                 </a:solidFill>
                 <a:latin typeface="Calibri"/>
               </a:rPr>
-              <a:t>edge_sim + OPC UA thật</a:t>
+              <a:t>   quan trắc nước thải</a:t>
+            </a:r>
+          </a:p>
+          <a:p>
+            <a:pPr algn="l">
+              <a:lnSpc>
+                <a:spcPct val="106000"/>
+              </a:lnSpc>
+              <a:spcAft>
+                <a:spcPts val="200"/>
+              </a:spcAft>
+            </a:pPr>
+            <a:r>
+              <a:rPr sz="1200" b="0" i="0">
+                <a:solidFill>
+                  <a:srgbClr val="222A3A"/>
+                </a:solidFill>
+                <a:latin typeface="Calibri"/>
+              </a:rPr>
+              <a:t>Tự làm mới 15s + tự</a:t>
+            </a:r>
+          </a:p>
+          <a:p>
+            <a:pPr algn="l">
+              <a:lnSpc>
+                <a:spcPct val="106000"/>
+              </a:lnSpc>
+              <a:spcAft>
+                <a:spcPts val="200"/>
+              </a:spcAft>
+            </a:pPr>
+            <a:r>
+              <a:rPr sz="1200" b="0" i="0">
+                <a:solidFill>
+                  <a:srgbClr val="222A3A"/>
+                </a:solidFill>
+                <a:latin typeface="Calibri"/>
+              </a:rPr>
+              <a:t>   thử lại kết nối lỗi</a:t>
             </a:r>
           </a:p>
         </p:txBody>

--- a/docs/MES-TinhNang.pptx
+++ b/docs/MES-TinhNang.pptx
@@ -3479,7 +3479,7 @@
                 </a:solidFill>
                 <a:latin typeface="Calibri"/>
               </a:rPr>
-              <a:t>Danh sách Tính năng  ·  Phiên bản 0.1.0-mvp  ·  Tài liệu hướng dẫn nội bộ</a:t>
+              <a:t>Danh sách Tính năng  ·  Phiên bản 0.1.0-mvp  ·  Cập nhật 25/07/2026</a:t>
             </a:r>
           </a:p>
         </p:txBody>
@@ -6935,7 +6935,7 @@
                 </a:solidFill>
                 <a:latin typeface="Calibri"/>
               </a:rPr>
-              <a:t>Kho TP (WMS theo unit)</a:t>
+              <a:t>Kho TP (WMS theo LÔ)</a:t>
             </a:r>
           </a:p>
         </p:txBody>
@@ -6977,7 +6977,7 @@
                 </a:solidFill>
                 <a:latin typeface="Calibri"/>
               </a:rPr>
-              <a:t>FinishedGoodsUnit (thay pallet)</a:t>
+              <a:t>1 dòng/lô — không còn 1 dòng/vỉ</a:t>
             </a:r>
           </a:p>
           <a:p>
